--- a/pipeline/launch/презентации/03-Правила-прогрева-2026.pptx
+++ b/pipeline/launch/презентации/03-Правила-прогрева-2026.pptx
@@ -5792,7 +5792,7 @@
                 <a:ea typeface="Cambria" pitchFamily="34" charset="-122"/>
                 <a:cs typeface="Cambria" pitchFamily="34" charset="-120"/>
               </a:rPr>
-              <a:t>Алгоритм — это не один алгоритм</a:t>
+              <a:t>Сторис ранжируются по отношениям</a:t>
             </a:r>
             <a:endParaRPr lang="en-US" sz="3200" dirty="0"/>
           </a:p>
@@ -5806,8 +5806,8 @@
         </p:nvSpPr>
         <p:spPr>
           <a:xfrm>
-            <a:off x="640080" y="1463040"/>
-            <a:ext cx="10881360" cy="640080"/>
+            <a:off x="640080" y="1481328"/>
+            <a:ext cx="10881360" cy="685800"/>
           </a:xfrm>
           <a:prstGeom prst="rect">
             <a:avLst/>
@@ -5834,7 +5834,7 @@
                 <a:ea typeface="Calibri" pitchFamily="34" charset="-122"/>
                 <a:cs typeface="Calibri" pitchFamily="34" charset="-120"/>
               </a:rPr>
-              <a:t>Instagram официально отказался от единого «алгоритма»: у Ленты, Сторис, Рилс и Интересного — разные системы ранжирования. Для прогрева это значит разделение труда.</a:t>
+              <a:t>Instagram официально отказался от единого «алгоритма»: у каждого формата своя система ранжирования. Сторис ранжируются не по качеству контента, а по отношениям — история просмотров, ответы в директ, частота взаимодействия.</a:t>
             </a:r>
             <a:endParaRPr lang="en-US" sz="1450" dirty="0"/>
           </a:p>
@@ -5848,12 +5848,12 @@
         </p:nvSpPr>
         <p:spPr>
           <a:xfrm>
-            <a:off x="640080" y="2286000"/>
-            <a:ext cx="5349240" cy="1828800"/>
+            <a:off x="640080" y="2331720"/>
+            <a:ext cx="3474720" cy="1737360"/>
           </a:xfrm>
           <a:prstGeom prst="roundRect">
             <a:avLst>
-              <a:gd name="adj" fmla="val 4000"/>
+              <a:gd name="adj" fmla="val 4211"/>
             </a:avLst>
           </a:prstGeom>
           <a:solidFill>
@@ -5882,8 +5882,8 @@
         </p:nvSpPr>
         <p:spPr>
           <a:xfrm>
-            <a:off x="960120" y="2468880"/>
-            <a:ext cx="4754880" cy="457200"/>
+            <a:off x="914400" y="2542032"/>
+            <a:ext cx="2926080" cy="365760"/>
           </a:xfrm>
           <a:prstGeom prst="rect">
             <a:avLst/>
@@ -5899,7 +5899,7 @@
               <a:buNone/>
             </a:pPr>
             <a:r>
-              <a:rPr lang="en-US" sz="2400" b="1" spc="200" kern="0" dirty="0">
+              <a:rPr lang="en-US" sz="1600" b="1" dirty="0">
                 <a:solidFill>
                   <a:srgbClr val="2E7D8F"/>
                 </a:solidFill>
@@ -5907,9 +5907,9 @@
                 <a:ea typeface="Cambria" pitchFamily="34" charset="-122"/>
                 <a:cs typeface="Cambria" pitchFamily="34" charset="-120"/>
               </a:rPr>
-              <a:t>РИЛС</a:t>
-            </a:r>
-            <a:endParaRPr lang="en-US" sz="2400" dirty="0"/>
+              <a:t>Ответы в директ</a:t>
+            </a:r>
+            <a:endParaRPr lang="en-US" sz="1600" dirty="0"/>
           </a:p>
         </p:txBody>
       </p:sp>
@@ -5921,8 +5921,8 @@
         </p:nvSpPr>
         <p:spPr>
           <a:xfrm>
-            <a:off x="960120" y="2971800"/>
-            <a:ext cx="4754880" cy="457200"/>
+            <a:off x="914400" y="2971800"/>
+            <a:ext cx="2926080" cy="914400"/>
           </a:xfrm>
           <a:prstGeom prst="rect">
             <a:avLst/>
@@ -5936,51 +5936,12 @@
           <a:p>
             <a:pPr indent="0" marL="0">
               <a:lnSpc>
-                <a:spcPts val="2000"/>
+                <a:spcPts val="1700"/>
               </a:lnSpc>
               <a:buNone/>
             </a:pPr>
             <a:r>
-              <a:rPr lang="en-US" sz="1500" dirty="0">
-                <a:solidFill>
-                  <a:srgbClr val="1A2E4A"/>
-                </a:solidFill>
-                <a:latin typeface="Calibri" pitchFamily="34" charset="0"/>
-                <a:ea typeface="Calibri" pitchFamily="34" charset="-122"/>
-                <a:cs typeface="Calibri" pitchFamily="34" charset="-120"/>
-              </a:rPr>
-              <a:t>охват среди неподписчиков, вход новых людей</a:t>
-            </a:r>
-            <a:endParaRPr lang="en-US" sz="1500" dirty="0"/>
-          </a:p>
-        </p:txBody>
-      </p:sp>
-      <p:sp>
-        <p:nvSpPr>
-          <p:cNvPr id="8" name="Text 6"/>
-          <p:cNvSpPr/>
-          <p:nvPr/>
-        </p:nvSpPr>
-        <p:spPr>
-          <a:xfrm>
-            <a:off x="960120" y="3520440"/>
-            <a:ext cx="4754880" cy="411480"/>
-          </a:xfrm>
-          <a:prstGeom prst="rect">
-            <a:avLst/>
-          </a:prstGeom>
-          <a:noFill/>
-          <a:ln/>
-        </p:spPr>
-        <p:txBody>
-          <a:bodyPr wrap="square" lIns="0" tIns="0" rIns="0" bIns="0" rtlCol="0" anchor="ctr"/>
-          <a:lstStyle/>
-          <a:p>
-            <a:pPr indent="0" marL="0">
-              <a:buNone/>
-            </a:pPr>
-            <a:r>
-              <a:rPr lang="en-US" sz="1250" i="1" dirty="0">
+              <a:rPr lang="en-US" sz="1250" dirty="0">
                 <a:solidFill>
                   <a:srgbClr val="5F7183"/>
                 </a:solidFill>
@@ -5988,7 +5949,7 @@
                 <a:ea typeface="Calibri" pitchFamily="34" charset="-122"/>
                 <a:cs typeface="Calibri" pitchFamily="34" charset="-120"/>
               </a:rPr>
-              <a:t>Не ждать: продаж в лоб</a:t>
+              <a:t>самый сильный сигнал: человек написал вам — значит вы для него важны</a:t>
             </a:r>
             <a:endParaRPr lang="en-US" sz="1250" dirty="0"/>
           </a:p>
@@ -5996,18 +5957,18 @@
       </p:sp>
       <p:sp>
         <p:nvSpPr>
-          <p:cNvPr id="9" name="Shape 7"/>
-          <p:cNvSpPr/>
-          <p:nvPr/>
-        </p:nvSpPr>
-        <p:spPr>
-          <a:xfrm>
-            <a:off x="6172200" y="2286000"/>
-            <a:ext cx="5349240" cy="1828800"/>
+          <p:cNvPr id="8" name="Shape 6"/>
+          <p:cNvSpPr/>
+          <p:nvPr/>
+        </p:nvSpPr>
+        <p:spPr>
+          <a:xfrm>
+            <a:off x="4343400" y="2331720"/>
+            <a:ext cx="3474720" cy="1737360"/>
           </a:xfrm>
           <a:prstGeom prst="roundRect">
             <a:avLst>
-              <a:gd name="adj" fmla="val 4000"/>
+              <a:gd name="adj" fmla="val 4211"/>
             </a:avLst>
           </a:prstGeom>
           <a:solidFill>
@@ -6030,14 +5991,14 @@
       </p:sp>
       <p:sp>
         <p:nvSpPr>
-          <p:cNvPr id="10" name="Text 8"/>
-          <p:cNvSpPr/>
-          <p:nvPr/>
-        </p:nvSpPr>
-        <p:spPr>
-          <a:xfrm>
-            <a:off x="6492240" y="2468880"/>
-            <a:ext cx="4754880" cy="457200"/>
+          <p:cNvPr id="9" name="Text 7"/>
+          <p:cNvSpPr/>
+          <p:nvPr/>
+        </p:nvSpPr>
+        <p:spPr>
+          <a:xfrm>
+            <a:off x="4617720" y="2542032"/>
+            <a:ext cx="2926080" cy="365760"/>
           </a:xfrm>
           <a:prstGeom prst="rect">
             <a:avLst/>
@@ -6053,30 +6014,30 @@
               <a:buNone/>
             </a:pPr>
             <a:r>
-              <a:rPr lang="en-US" sz="2400" b="1" spc="200" kern="0" dirty="0">
+              <a:rPr lang="en-US" sz="1600" b="1" dirty="0">
                 <a:solidFill>
-                  <a:srgbClr val="E9A03B"/>
+                  <a:srgbClr val="2E7D8F"/>
                 </a:solidFill>
                 <a:latin typeface="Cambria" pitchFamily="34" charset="0"/>
                 <a:ea typeface="Cambria" pitchFamily="34" charset="-122"/>
                 <a:cs typeface="Cambria" pitchFamily="34" charset="-120"/>
               </a:rPr>
-              <a:t>СТОРИС</a:t>
-            </a:r>
-            <a:endParaRPr lang="en-US" sz="2400" dirty="0"/>
-          </a:p>
-        </p:txBody>
-      </p:sp>
-      <p:sp>
-        <p:nvSpPr>
-          <p:cNvPr id="11" name="Text 9"/>
-          <p:cNvSpPr/>
-          <p:nvPr/>
-        </p:nvSpPr>
-        <p:spPr>
-          <a:xfrm>
-            <a:off x="6492240" y="2971800"/>
-            <a:ext cx="4754880" cy="457200"/>
+              <a:t>Касания стикеров</a:t>
+            </a:r>
+            <a:endParaRPr lang="en-US" sz="1600" dirty="0"/>
+          </a:p>
+        </p:txBody>
+      </p:sp>
+      <p:sp>
+        <p:nvSpPr>
+          <p:cNvPr id="10" name="Text 8"/>
+          <p:cNvSpPr/>
+          <p:nvPr/>
+        </p:nvSpPr>
+        <p:spPr>
+          <a:xfrm>
+            <a:off x="4617720" y="2971800"/>
+            <a:ext cx="2926080" cy="914400"/>
           </a:xfrm>
           <a:prstGeom prst="rect">
             <a:avLst/>
@@ -6090,51 +6051,12 @@
           <a:p>
             <a:pPr indent="0" marL="0">
               <a:lnSpc>
-                <a:spcPts val="2000"/>
+                <a:spcPts val="1700"/>
               </a:lnSpc>
               <a:buNone/>
             </a:pPr>
             <a:r>
-              <a:rPr lang="en-US" sz="1500" dirty="0">
-                <a:solidFill>
-                  <a:srgbClr val="1A2E4A"/>
-                </a:solidFill>
-                <a:latin typeface="Calibri" pitchFamily="34" charset="0"/>
-                <a:ea typeface="Calibri" pitchFamily="34" charset="-122"/>
-                <a:cs typeface="Calibri" pitchFamily="34" charset="-120"/>
-              </a:rPr>
-              <a:t>конверсия: клик, ответ, заявка</a:t>
-            </a:r>
-            <a:endParaRPr lang="en-US" sz="1500" dirty="0"/>
-          </a:p>
-        </p:txBody>
-      </p:sp>
-      <p:sp>
-        <p:nvSpPr>
-          <p:cNvPr id="12" name="Text 10"/>
-          <p:cNvSpPr/>
-          <p:nvPr/>
-        </p:nvSpPr>
-        <p:spPr>
-          <a:xfrm>
-            <a:off x="6492240" y="3520440"/>
-            <a:ext cx="4754880" cy="411480"/>
-          </a:xfrm>
-          <a:prstGeom prst="rect">
-            <a:avLst/>
-          </a:prstGeom>
-          <a:noFill/>
-          <a:ln/>
-        </p:spPr>
-        <p:txBody>
-          <a:bodyPr wrap="square" lIns="0" tIns="0" rIns="0" bIns="0" rtlCol="0" anchor="ctr"/>
-          <a:lstStyle/>
-          <a:p>
-            <a:pPr indent="0" marL="0">
-              <a:buNone/>
-            </a:pPr>
-            <a:r>
-              <a:rPr lang="en-US" sz="1250" i="1" dirty="0">
+              <a:rPr lang="en-US" sz="1250" dirty="0">
                 <a:solidFill>
                   <a:srgbClr val="5F7183"/>
                 </a:solidFill>
@@ -6142,7 +6064,7 @@
                 <a:ea typeface="Calibri" pitchFamily="34" charset="-122"/>
                 <a:cs typeface="Calibri" pitchFamily="34" charset="-120"/>
               </a:rPr>
-              <a:t>Не ждать: охвата новой аудитории</a:t>
+              <a:t>опрос, вопрос, реакция — всё это взаимодействие, а не просто просмотр</a:t>
             </a:r>
             <a:endParaRPr lang="en-US" sz="1250" dirty="0"/>
           </a:p>
@@ -6150,18 +6072,133 @@
       </p:sp>
       <p:sp>
         <p:nvSpPr>
-          <p:cNvPr id="13" name="Shape 11"/>
-          <p:cNvSpPr/>
-          <p:nvPr/>
-        </p:nvSpPr>
-        <p:spPr>
-          <a:xfrm>
-            <a:off x="640080" y="4389120"/>
-            <a:ext cx="10881360" cy="1371600"/>
+          <p:cNvPr id="11" name="Shape 9"/>
+          <p:cNvSpPr/>
+          <p:nvPr/>
+        </p:nvSpPr>
+        <p:spPr>
+          <a:xfrm>
+            <a:off x="8046720" y="2331720"/>
+            <a:ext cx="3474720" cy="1737360"/>
           </a:xfrm>
           <a:prstGeom prst="roundRect">
             <a:avLst>
-              <a:gd name="adj" fmla="val 5333"/>
+              <a:gd name="adj" fmla="val 4211"/>
+            </a:avLst>
+          </a:prstGeom>
+          <a:solidFill>
+            <a:srgbClr val="F1F4F7"/>
+          </a:solidFill>
+          <a:ln w="12700">
+            <a:solidFill>
+              <a:srgbClr val="F1F4F7"/>
+            </a:solidFill>
+            <a:prstDash val="solid"/>
+          </a:ln>
+          <a:effectLst>
+            <a:outerShdw sx="100000" sy="100000" kx="0" ky="0" algn="bl" rotWithShape="0" blurRad="127000" dist="25400" dir="5400000">
+              <a:srgbClr val="000000">
+                <a:alpha val="10000"/>
+              </a:srgbClr>
+            </a:outerShdw>
+          </a:effectLst>
+        </p:spPr>
+      </p:sp>
+      <p:sp>
+        <p:nvSpPr>
+          <p:cNvPr id="12" name="Text 10"/>
+          <p:cNvSpPr/>
+          <p:nvPr/>
+        </p:nvSpPr>
+        <p:spPr>
+          <a:xfrm>
+            <a:off x="8321040" y="2542032"/>
+            <a:ext cx="2926080" cy="365760"/>
+          </a:xfrm>
+          <a:prstGeom prst="rect">
+            <a:avLst/>
+          </a:prstGeom>
+          <a:noFill/>
+          <a:ln/>
+        </p:spPr>
+        <p:txBody>
+          <a:bodyPr wrap="square" lIns="0" tIns="0" rIns="0" bIns="0" rtlCol="0" anchor="ctr"/>
+          <a:lstStyle/>
+          <a:p>
+            <a:pPr indent="0" marL="0">
+              <a:buNone/>
+            </a:pPr>
+            <a:r>
+              <a:rPr lang="en-US" sz="1600" b="1" dirty="0">
+                <a:solidFill>
+                  <a:srgbClr val="2E7D8F"/>
+                </a:solidFill>
+                <a:latin typeface="Cambria" pitchFamily="34" charset="0"/>
+                <a:ea typeface="Cambria" pitchFamily="34" charset="-122"/>
+                <a:cs typeface="Cambria" pitchFamily="34" charset="-120"/>
+              </a:rPr>
+              <a:t>Частота возврата</a:t>
+            </a:r>
+            <a:endParaRPr lang="en-US" sz="1600" dirty="0"/>
+          </a:p>
+        </p:txBody>
+      </p:sp>
+      <p:sp>
+        <p:nvSpPr>
+          <p:cNvPr id="13" name="Text 11"/>
+          <p:cNvSpPr/>
+          <p:nvPr/>
+        </p:nvSpPr>
+        <p:spPr>
+          <a:xfrm>
+            <a:off x="8321040" y="2971800"/>
+            <a:ext cx="2926080" cy="914400"/>
+          </a:xfrm>
+          <a:prstGeom prst="rect">
+            <a:avLst/>
+          </a:prstGeom>
+          <a:noFill/>
+          <a:ln/>
+        </p:spPr>
+        <p:txBody>
+          <a:bodyPr wrap="square" lIns="0" tIns="0" rIns="0" bIns="0" rtlCol="0" anchor="ctr"/>
+          <a:lstStyle/>
+          <a:p>
+            <a:pPr indent="0" marL="0">
+              <a:lnSpc>
+                <a:spcPts val="1700"/>
+              </a:lnSpc>
+              <a:buNone/>
+            </a:pPr>
+            <a:r>
+              <a:rPr lang="en-US" sz="1250" dirty="0">
+                <a:solidFill>
+                  <a:srgbClr val="5F7183"/>
+                </a:solidFill>
+                <a:latin typeface="Calibri" pitchFamily="34" charset="0"/>
+                <a:ea typeface="Calibri" pitchFamily="34" charset="-122"/>
+                <a:cs typeface="Calibri" pitchFamily="34" charset="-120"/>
+              </a:rPr>
+              <a:t>тот, кто смотрит вас каждый день, видит вас первым</a:t>
+            </a:r>
+            <a:endParaRPr lang="en-US" sz="1250" dirty="0"/>
+          </a:p>
+        </p:txBody>
+      </p:sp>
+      <p:sp>
+        <p:nvSpPr>
+          <p:cNvPr id="14" name="Shape 12"/>
+          <p:cNvSpPr/>
+          <p:nvPr/>
+        </p:nvSpPr>
+        <p:spPr>
+          <a:xfrm>
+            <a:off x="640080" y="4343400"/>
+            <a:ext cx="10881360" cy="1417320"/>
+          </a:xfrm>
+          <a:prstGeom prst="roundRect">
+            <a:avLst>
+              <a:gd name="adj" fmla="val 5161"/>
             </a:avLst>
           </a:prstGeom>
           <a:solidFill>
@@ -6184,13 +6221,13 @@
       </p:sp>
       <p:sp>
         <p:nvSpPr>
-          <p:cNvPr id="14" name="Text 12"/>
-          <p:cNvSpPr/>
-          <p:nvPr/>
-        </p:nvSpPr>
-        <p:spPr>
-          <a:xfrm>
-            <a:off x="960120" y="4553712"/>
+          <p:cNvPr id="15" name="Text 13"/>
+          <p:cNvSpPr/>
+          <p:nvPr/>
+        </p:nvSpPr>
+        <p:spPr>
+          <a:xfrm>
+            <a:off x="960120" y="4526280"/>
             <a:ext cx="10241280" cy="320040"/>
           </a:xfrm>
           <a:prstGeom prst="rect">
@@ -6223,13 +6260,13 @@
       </p:sp>
       <p:sp>
         <p:nvSpPr>
-          <p:cNvPr id="15" name="Text 13"/>
-          <p:cNvSpPr/>
-          <p:nvPr/>
-        </p:nvSpPr>
-        <p:spPr>
-          <a:xfrm>
-            <a:off x="960120" y="4892040"/>
+          <p:cNvPr id="16" name="Text 14"/>
+          <p:cNvSpPr/>
+          <p:nvPr/>
+        </p:nvSpPr>
+        <p:spPr>
+          <a:xfrm>
+            <a:off x="960120" y="4864608"/>
             <a:ext cx="10241280" cy="777240"/>
           </a:xfrm>
           <a:prstGeom prst="rect">
@@ -6257,7 +6294,7 @@
                 <a:ea typeface="Calibri" pitchFamily="34" charset="-122"/>
                 <a:cs typeface="Calibri" pitchFamily="34" charset="-120"/>
               </a:rPr>
-              <a:t>Сторис ранжируются по отношениям: история просмотров, ответы в директ, частота взаимодействия. Значит интерактив ставится каждый день прогрева. Опрос работает дважды — собирает данные и покупает место в начале ленты на завтра. Пропущенный опрос стоит охвата, а не только ответов.</a:t>
+              <a:t>Интерактив ставится каждый день прогрева, без исключений. Опрос работает дважды: собирает данные и возражения — и покупает вам место в начале ленты на завтра. Пропущенный опрос стоит охвата, а не только ответов.</a:t>
             </a:r>
             <a:endParaRPr lang="en-US" sz="1350" dirty="0"/>
           </a:p>
